--- a/06_relazioni_e_parametri/Slides/08_dinamica.pptx
+++ b/06_relazioni_e_parametri/Slides/08_dinamica.pptx
@@ -923,7 +923,7 @@
         <p:spPr>
           <a:xfrm>
             <a:off x="640080" y="713232"/>
-            <a:ext cx="9144000" cy="777240"/>
+            <a:ext cx="10058400" cy="777240"/>
           </a:xfrm>
           <a:prstGeom prst="rect">
             <a:avLst/>
@@ -939,7 +939,7 @@
               <a:buNone/>
             </a:pPr>
             <a:r>
-              <a:rPr lang="en-US" sz="3800" b="1" dirty="0">
+              <a:rPr lang="en-US" sz="3400" b="1" dirty="0">
                 <a:solidFill>
                   <a:srgbClr val="16233A"/>
                 </a:solidFill>
@@ -947,9 +947,9 @@
                 <a:ea typeface="Calibri" pitchFamily="34" charset="-122"/>
                 <a:cs typeface="Calibri" pitchFamily="34" charset="-120"/>
               </a:rPr>
-              <a:t>Dinamica</a:t>
-            </a:r>
-            <a:endParaRPr lang="en-US" sz="3800" dirty="0"/>
+              <a:t>Metodo di Trotter e verifica</a:t>
+            </a:r>
+            <a:endParaRPr lang="en-US" sz="3400" dirty="0"/>
           </a:p>
         </p:txBody>
       </p:sp>
@@ -962,11 +962,11 @@
         <p:spPr>
           <a:xfrm>
             <a:off x="640080" y="1536192"/>
-            <a:ext cx="10911535" cy="868680"/>
+            <a:ext cx="10911535" cy="566928"/>
           </a:xfrm>
           <a:prstGeom prst="roundRect">
             <a:avLst>
-              <a:gd name="adj" fmla="val 8421"/>
+              <a:gd name="adj" fmla="val 12903"/>
             </a:avLst>
           </a:prstGeom>
           <a:solidFill>
@@ -983,8 +983,8 @@
         </p:nvSpPr>
         <p:spPr>
           <a:xfrm>
-            <a:off x="640080" y="1572768"/>
-            <a:ext cx="10911535" cy="384048"/>
+            <a:off x="640080" y="1536192"/>
+            <a:ext cx="10911535" cy="566928"/>
           </a:xfrm>
           <a:prstGeom prst="rect">
             <a:avLst/>
@@ -993,14 +993,14 @@
           <a:ln/>
         </p:spPr>
         <p:txBody>
-          <a:bodyPr wrap="square" lIns="0" tIns="0" rIns="0" bIns="0" rtlCol="0" anchor="b"/>
+          <a:bodyPr wrap="square" lIns="0" tIns="0" rIns="0" bIns="0" rtlCol="0" anchor="ctr"/>
           <a:lstStyle/>
           <a:p>
             <a:pPr algn="ctr" indent="0" marL="0">
               <a:buNone/>
             </a:pPr>
             <a:r>
-              <a:rPr lang="en-US" sz="1900" b="1" dirty="0">
+              <a:rPr lang="en-US" sz="2100" b="1" dirty="0">
                 <a:solidFill>
                   <a:srgbClr val="173A5E"/>
                 </a:solidFill>
@@ -1014,7 +1014,7 @@
               <a:buNone/>
             </a:pPr>
             <a:r>
-              <a:rPr lang="en-US" sz="1900" b="1" baseline="30000" dirty="0">
+              <a:rPr lang="en-US" sz="2100" b="1" baseline="30000" dirty="0">
                 <a:solidFill>
                   <a:srgbClr val="173A5E"/>
                 </a:solidFill>
@@ -1028,7 +1028,7 @@
               <a:buNone/>
             </a:pPr>
             <a:r>
-              <a:rPr lang="en-US" sz="1900" b="1" dirty="0">
+              <a:rPr lang="en-US" sz="2100" b="1" dirty="0">
                 <a:solidFill>
                   <a:srgbClr val="173A5E"/>
                 </a:solidFill>
@@ -1042,7 +1042,7 @@
               <a:buNone/>
             </a:pPr>
             <a:r>
-              <a:rPr lang="en-US" sz="1900" b="1" baseline="30000" dirty="0">
+              <a:rPr lang="en-US" sz="2100" b="1" baseline="30000" dirty="0">
                 <a:solidFill>
                   <a:srgbClr val="173A5E"/>
                 </a:solidFill>
@@ -1052,20 +1052,42 @@
               </a:rPr>
               <a:t>−iH₁τ</a:t>
             </a:r>
-            <a:endParaRPr lang="en-US" sz="1900" dirty="0"/>
-          </a:p>
-        </p:txBody>
-      </p:sp>
-      <p:sp>
-        <p:nvSpPr>
-          <p:cNvPr id="6" name="Text 4"/>
+            <a:endParaRPr lang="en-US" sz="2100" dirty="0"/>
+          </a:p>
+        </p:txBody>
+      </p:sp>
+      <p:sp>
+        <p:nvSpPr>
+          <p:cNvPr id="6" name="Shape 4"/>
+          <p:cNvSpPr/>
+          <p:nvPr/>
+        </p:nvSpPr>
+        <p:spPr>
+          <a:xfrm>
+            <a:off x="640080" y="2331720"/>
+            <a:ext cx="5120640" cy="1417320"/>
+          </a:xfrm>
+          <a:prstGeom prst="roundRect">
+            <a:avLst>
+              <a:gd name="adj" fmla="val 6452"/>
+            </a:avLst>
+          </a:prstGeom>
+          <a:solidFill>
+            <a:srgbClr val="F2F5F9"/>
+          </a:solidFill>
+          <a:ln/>
+        </p:spPr>
+      </p:sp>
+      <p:sp>
+        <p:nvSpPr>
+          <p:cNvPr id="7" name="Text 5"/>
           <p:cNvSpPr txBox="1"/>
           <p:nvPr/>
         </p:nvSpPr>
         <p:spPr>
           <a:xfrm>
-            <a:off x="640080" y="1956816"/>
-            <a:ext cx="10911535" cy="384048"/>
+            <a:off x="960120" y="2478024"/>
+            <a:ext cx="4480560" cy="310896"/>
           </a:xfrm>
           <a:prstGeom prst="rect">
             <a:avLst/>
@@ -1074,14 +1096,14 @@
           <a:ln/>
         </p:spPr>
         <p:txBody>
-          <a:bodyPr wrap="square" lIns="0" tIns="0" rIns="0" bIns="0" rtlCol="0" anchor="t"/>
+          <a:bodyPr wrap="square" lIns="0" tIns="0" rIns="0" bIns="0" rtlCol="0" anchor="ctr"/>
           <a:lstStyle/>
           <a:p>
-            <a:pPr algn="ctr" indent="0" marL="0">
+            <a:pPr indent="0" marL="0">
               <a:buNone/>
             </a:pPr>
             <a:r>
-              <a:rPr lang="en-US" sz="1900" b="1" dirty="0">
+              <a:rPr lang="en-US" sz="1500" b="1" dirty="0">
                 <a:solidFill>
                   <a:srgbClr val="173A5E"/>
                 </a:solidFill>
@@ -1089,13 +1111,177 @@
                 <a:ea typeface="Calibri" pitchFamily="34" charset="-122"/>
                 <a:cs typeface="Calibri" pitchFamily="34" charset="-120"/>
               </a:rPr>
-              <a:t>C</a:t>
-            </a:r>
-            <a:pPr algn="ctr" indent="0" marL="0">
+              <a:t>P2 — punto di lavoro per la dinamica</a:t>
+            </a:r>
+            <a:endParaRPr lang="en-US" sz="1500" dirty="0"/>
+          </a:p>
+        </p:txBody>
+      </p:sp>
+      <p:sp>
+        <p:nvSpPr>
+          <p:cNvPr id="8" name="Text 6"/>
+          <p:cNvSpPr txBox="1"/>
+          <p:nvPr/>
+        </p:nvSpPr>
+        <p:spPr>
+          <a:xfrm>
+            <a:off x="960120" y="2825496"/>
+            <a:ext cx="4480560" cy="292608"/>
+          </a:xfrm>
+          <a:prstGeom prst="rect">
+            <a:avLst/>
+          </a:prstGeom>
+          <a:noFill/>
+          <a:ln/>
+        </p:spPr>
+        <p:txBody>
+          <a:bodyPr wrap="square" lIns="0" tIns="0" rIns="0" bIns="0" rtlCol="0" anchor="ctr"/>
+          <a:lstStyle/>
+          <a:p>
+            <a:pPr indent="0" marL="0">
               <a:buNone/>
             </a:pPr>
             <a:r>
-              <a:rPr lang="en-US" sz="1900" b="1" baseline="30000" dirty="0">
+              <a:rPr lang="en-US" sz="1350" b="1" dirty="0">
+                <a:solidFill>
+                  <a:srgbClr val="16233A"/>
+                </a:solidFill>
+                <a:latin typeface="Calibri" pitchFamily="34" charset="0"/>
+                <a:ea typeface="Calibri" pitchFamily="34" charset="-122"/>
+                <a:cs typeface="Calibri" pitchFamily="34" charset="-120"/>
+              </a:rPr>
+              <a:t>b/J = −0.18,  D/J = 1</a:t>
+            </a:r>
+            <a:endParaRPr lang="en-US" sz="1350" dirty="0"/>
+          </a:p>
+        </p:txBody>
+      </p:sp>
+      <p:sp>
+        <p:nvSpPr>
+          <p:cNvPr id="9" name="Text 7"/>
+          <p:cNvSpPr txBox="1"/>
+          <p:nvPr/>
+        </p:nvSpPr>
+        <p:spPr>
+          <a:xfrm>
+            <a:off x="960120" y="3172968"/>
+            <a:ext cx="4480560" cy="292608"/>
+          </a:xfrm>
+          <a:prstGeom prst="rect">
+            <a:avLst/>
+          </a:prstGeom>
+          <a:noFill/>
+          <a:ln/>
+        </p:spPr>
+        <p:txBody>
+          <a:bodyPr wrap="square" lIns="0" tIns="0" rIns="0" bIns="0" rtlCol="0" anchor="ctr"/>
+          <a:lstStyle/>
+          <a:p>
+            <a:pPr indent="0" marL="0">
+              <a:buNone/>
+            </a:pPr>
+            <a:r>
+              <a:rPr lang="en-US" sz="1350" dirty="0">
+                <a:solidFill>
+                  <a:srgbClr val="16233A"/>
+                </a:solidFill>
+                <a:latin typeface="Calibri" pitchFamily="34" charset="0"/>
+                <a:ea typeface="Calibri" pitchFamily="34" charset="-122"/>
+                <a:cs typeface="Calibri" pitchFamily="34" charset="-120"/>
+              </a:rPr>
+              <a:t>Stato iniziale: |↑↑⟩</a:t>
+            </a:r>
+            <a:endParaRPr lang="en-US" sz="1350" dirty="0"/>
+          </a:p>
+        </p:txBody>
+      </p:sp>
+      <p:sp>
+        <p:nvSpPr>
+          <p:cNvPr id="10" name="Text 8"/>
+          <p:cNvSpPr txBox="1"/>
+          <p:nvPr/>
+        </p:nvSpPr>
+        <p:spPr>
+          <a:xfrm>
+            <a:off x="960120" y="3465576"/>
+            <a:ext cx="4480560" cy="256032"/>
+          </a:xfrm>
+          <a:prstGeom prst="rect">
+            <a:avLst/>
+          </a:prstGeom>
+          <a:noFill/>
+          <a:ln/>
+        </p:spPr>
+        <p:txBody>
+          <a:bodyPr wrap="square" lIns="0" tIns="0" rIns="0" bIns="0" rtlCol="0" anchor="ctr"/>
+          <a:lstStyle/>
+          <a:p>
+            <a:pPr indent="0" marL="0">
+              <a:buNone/>
+            </a:pPr>
+            <a:r>
+              <a:rPr lang="en-US" sz="1100" i="1" dirty="0">
+                <a:solidFill>
+                  <a:srgbClr val="5B6B84"/>
+                </a:solidFill>
+                <a:latin typeface="Calibri" pitchFamily="34" charset="0"/>
+                <a:ea typeface="Calibri" pitchFamily="34" charset="-122"/>
+                <a:cs typeface="Calibri" pitchFamily="34" charset="-120"/>
+              </a:rPr>
+              <a:t>già usato in 07 per la sensibilità a D/J</a:t>
+            </a:r>
+            <a:endParaRPr lang="en-US" sz="1100" dirty="0"/>
+          </a:p>
+        </p:txBody>
+      </p:sp>
+      <p:sp>
+        <p:nvSpPr>
+          <p:cNvPr id="11" name="Shape 9"/>
+          <p:cNvSpPr/>
+          <p:nvPr/>
+        </p:nvSpPr>
+        <p:spPr>
+          <a:xfrm>
+            <a:off x="640080" y="3931920"/>
+            <a:ext cx="5120640" cy="1417320"/>
+          </a:xfrm>
+          <a:prstGeom prst="roundRect">
+            <a:avLst>
+              <a:gd name="adj" fmla="val 6452"/>
+            </a:avLst>
+          </a:prstGeom>
+          <a:solidFill>
+            <a:srgbClr val="F2F5F9"/>
+          </a:solidFill>
+          <a:ln/>
+        </p:spPr>
+      </p:sp>
+      <p:sp>
+        <p:nvSpPr>
+          <p:cNvPr id="12" name="Text 10"/>
+          <p:cNvSpPr txBox="1"/>
+          <p:nvPr/>
+        </p:nvSpPr>
+        <p:spPr>
+          <a:xfrm>
+            <a:off x="960120" y="4078224"/>
+            <a:ext cx="4480560" cy="310896"/>
+          </a:xfrm>
+          <a:prstGeom prst="rect">
+            <a:avLst/>
+          </a:prstGeom>
+          <a:noFill/>
+          <a:ln/>
+        </p:spPr>
+        <p:txBody>
+          <a:bodyPr wrap="square" lIns="0" tIns="0" rIns="0" bIns="0" rtlCol="0" anchor="ctr"/>
+          <a:lstStyle/>
+          <a:p>
+            <a:pPr indent="0" marL="0">
+              <a:buNone/>
+            </a:pPr>
+            <a:r>
+              <a:rPr lang="en-US" sz="1500" b="1" dirty="0">
                 <a:solidFill>
                   <a:srgbClr val="173A5E"/>
                 </a:solidFill>
@@ -1103,13 +1289,116 @@
                 <a:ea typeface="Calibri" pitchFamily="34" charset="-122"/>
                 <a:cs typeface="Calibri" pitchFamily="34" charset="-120"/>
               </a:rPr>
-              <a:t>αβ</a:t>
-            </a:r>
-            <a:pPr algn="ctr" indent="0" marL="0">
+              <a:t>Verifica dello scaling dell'errore</a:t>
+            </a:r>
+            <a:endParaRPr lang="en-US" sz="1500" dirty="0"/>
+          </a:p>
+        </p:txBody>
+      </p:sp>
+      <p:sp>
+        <p:nvSpPr>
+          <p:cNvPr id="13" name="Text 11"/>
+          <p:cNvSpPr txBox="1"/>
+          <p:nvPr/>
+        </p:nvSpPr>
+        <p:spPr>
+          <a:xfrm>
+            <a:off x="960120" y="4443984"/>
+            <a:ext cx="4480560" cy="292608"/>
+          </a:xfrm>
+          <a:prstGeom prst="rect">
+            <a:avLst/>
+          </a:prstGeom>
+          <a:noFill/>
+          <a:ln/>
+        </p:spPr>
+        <p:txBody>
+          <a:bodyPr wrap="square" lIns="0" tIns="0" rIns="0" bIns="0" rtlCol="0" anchor="ctr"/>
+          <a:lstStyle/>
+          <a:p>
+            <a:pPr indent="0" marL="0">
               <a:buNone/>
             </a:pPr>
             <a:r>
-              <a:rPr lang="en-US" sz="1900" b="1" dirty="0">
+              <a:rPr lang="en-US" sz="1300" dirty="0">
+                <a:solidFill>
+                  <a:srgbClr val="16233A"/>
+                </a:solidFill>
+                <a:latin typeface="Calibri" pitchFamily="34" charset="0"/>
+                <a:ea typeface="Calibri" pitchFamily="34" charset="-122"/>
+                <a:cs typeface="Calibri" pitchFamily="34" charset="-120"/>
+              </a:rPr>
+              <a:t>Pendenze misurate: −1.008 (operatore) — −2.059 (fidelity)</a:t>
+            </a:r>
+            <a:endParaRPr lang="en-US" sz="1300" dirty="0"/>
+          </a:p>
+        </p:txBody>
+      </p:sp>
+      <p:sp>
+        <p:nvSpPr>
+          <p:cNvPr id="14" name="Text 12"/>
+          <p:cNvSpPr txBox="1"/>
+          <p:nvPr/>
+        </p:nvSpPr>
+        <p:spPr>
+          <a:xfrm>
+            <a:off x="960120" y="4754880"/>
+            <a:ext cx="4480560" cy="274320"/>
+          </a:xfrm>
+          <a:prstGeom prst="rect">
+            <a:avLst/>
+          </a:prstGeom>
+          <a:noFill/>
+          <a:ln/>
+        </p:spPr>
+        <p:txBody>
+          <a:bodyPr wrap="square" lIns="0" tIns="0" rIns="0" bIns="0" rtlCol="0" anchor="ctr"/>
+          <a:lstStyle/>
+          <a:p>
+            <a:pPr indent="0" marL="0">
+              <a:buNone/>
+            </a:pPr>
+            <a:r>
+              <a:rPr lang="en-US" sz="1300" dirty="0">
+                <a:solidFill>
+                  <a:srgbClr val="5B6B84"/>
+                </a:solidFill>
+                <a:latin typeface="Calibri" pitchFamily="34" charset="0"/>
+                <a:ea typeface="Calibri" pitchFamily="34" charset="-122"/>
+                <a:cs typeface="Calibri" pitchFamily="34" charset="-120"/>
+              </a:rPr>
+              <a:t>Valori teorici attesi: −1 e −2</a:t>
+            </a:r>
+            <a:endParaRPr lang="en-US" sz="1300" dirty="0"/>
+          </a:p>
+        </p:txBody>
+      </p:sp>
+      <p:sp>
+        <p:nvSpPr>
+          <p:cNvPr id="15" name="Text 13"/>
+          <p:cNvSpPr txBox="1"/>
+          <p:nvPr/>
+        </p:nvSpPr>
+        <p:spPr>
+          <a:xfrm>
+            <a:off x="960120" y="5047488"/>
+            <a:ext cx="4480560" cy="274320"/>
+          </a:xfrm>
+          <a:prstGeom prst="rect">
+            <a:avLst/>
+          </a:prstGeom>
+          <a:noFill/>
+          <a:ln/>
+        </p:spPr>
+        <p:txBody>
+          <a:bodyPr wrap="square" lIns="0" tIns="0" rIns="0" bIns="0" rtlCol="0" anchor="ctr"/>
+          <a:lstStyle/>
+          <a:p>
+            <a:pPr indent="0" marL="0">
+              <a:buNone/>
+            </a:pPr>
+            <a:r>
+              <a:rPr lang="en-US" sz="1300" b="1" dirty="0">
                 <a:solidFill>
                   <a:srgbClr val="173A5E"/>
                 </a:solidFill>
@@ -1117,127 +1406,15 @@
                 <a:ea typeface="Calibri" pitchFamily="34" charset="-122"/>
                 <a:cs typeface="Calibri" pitchFamily="34" charset="-120"/>
               </a:rPr>
-              <a:t>(t) = ⟨ψ</a:t>
-            </a:r>
-            <a:pPr algn="ctr" indent="0" marL="0">
-              <a:buNone/>
-            </a:pPr>
-            <a:r>
-              <a:rPr lang="en-US" sz="1900" b="1" baseline="-40000" dirty="0">
-                <a:solidFill>
-                  <a:srgbClr val="173A5E"/>
-                </a:solidFill>
-                <a:latin typeface="Calibri" pitchFamily="34" charset="0"/>
-                <a:ea typeface="Calibri" pitchFamily="34" charset="-122"/>
-                <a:cs typeface="Calibri" pitchFamily="34" charset="-120"/>
-              </a:rPr>
-              <a:t>0</a:t>
-            </a:r>
-            <a:pPr algn="ctr" indent="0" marL="0">
-              <a:buNone/>
-            </a:pPr>
-            <a:r>
-              <a:rPr lang="en-US" sz="1900" b="1" dirty="0">
-                <a:solidFill>
-                  <a:srgbClr val="173A5E"/>
-                </a:solidFill>
-                <a:latin typeface="Calibri" pitchFamily="34" charset="0"/>
-                <a:ea typeface="Calibri" pitchFamily="34" charset="-122"/>
-                <a:cs typeface="Calibri" pitchFamily="34" charset="-120"/>
-              </a:rPr>
-              <a:t>|σ</a:t>
-            </a:r>
-            <a:pPr algn="ctr" indent="0" marL="0">
-              <a:buNone/>
-            </a:pPr>
-            <a:r>
-              <a:rPr lang="en-US" sz="1900" b="1" baseline="30000" dirty="0">
-                <a:solidFill>
-                  <a:srgbClr val="173A5E"/>
-                </a:solidFill>
-                <a:latin typeface="Calibri" pitchFamily="34" charset="0"/>
-                <a:ea typeface="Calibri" pitchFamily="34" charset="-122"/>
-                <a:cs typeface="Calibri" pitchFamily="34" charset="-120"/>
-              </a:rPr>
-              <a:t>α</a:t>
-            </a:r>
-            <a:pPr algn="ctr" indent="0" marL="0">
-              <a:buNone/>
-            </a:pPr>
-            <a:r>
-              <a:rPr lang="en-US" sz="1900" b="1" dirty="0">
-                <a:solidFill>
-                  <a:srgbClr val="173A5E"/>
-                </a:solidFill>
-                <a:latin typeface="Calibri" pitchFamily="34" charset="0"/>
-                <a:ea typeface="Calibri" pitchFamily="34" charset="-122"/>
-                <a:cs typeface="Calibri" pitchFamily="34" charset="-120"/>
-              </a:rPr>
-              <a:t>(t) σ</a:t>
-            </a:r>
-            <a:pPr algn="ctr" indent="0" marL="0">
-              <a:buNone/>
-            </a:pPr>
-            <a:r>
-              <a:rPr lang="en-US" sz="1900" b="1" baseline="30000" dirty="0">
-                <a:solidFill>
-                  <a:srgbClr val="173A5E"/>
-                </a:solidFill>
-                <a:latin typeface="Calibri" pitchFamily="34" charset="0"/>
-                <a:ea typeface="Calibri" pitchFamily="34" charset="-122"/>
-                <a:cs typeface="Calibri" pitchFamily="34" charset="-120"/>
-              </a:rPr>
-              <a:t>β</a:t>
-            </a:r>
-            <a:pPr algn="ctr" indent="0" marL="0">
-              <a:buNone/>
-            </a:pPr>
-            <a:r>
-              <a:rPr lang="en-US" sz="1900" b="1" dirty="0">
-                <a:solidFill>
-                  <a:srgbClr val="173A5E"/>
-                </a:solidFill>
-                <a:latin typeface="Calibri" pitchFamily="34" charset="0"/>
-                <a:ea typeface="Calibri" pitchFamily="34" charset="-122"/>
-                <a:cs typeface="Calibri" pitchFamily="34" charset="-120"/>
-              </a:rPr>
-              <a:t>(0)|ψ</a:t>
-            </a:r>
-            <a:pPr algn="ctr" indent="0" marL="0">
-              <a:buNone/>
-            </a:pPr>
-            <a:r>
-              <a:rPr lang="en-US" sz="1900" b="1" baseline="-40000" dirty="0">
-                <a:solidFill>
-                  <a:srgbClr val="173A5E"/>
-                </a:solidFill>
-                <a:latin typeface="Calibri" pitchFamily="34" charset="0"/>
-                <a:ea typeface="Calibri" pitchFamily="34" charset="-122"/>
-                <a:cs typeface="Calibri" pitchFamily="34" charset="-120"/>
-              </a:rPr>
-              <a:t>0</a:t>
-            </a:r>
-            <a:pPr algn="ctr" indent="0" marL="0">
-              <a:buNone/>
-            </a:pPr>
-            <a:r>
-              <a:rPr lang="en-US" sz="1900" b="1" dirty="0">
-                <a:solidFill>
-                  <a:srgbClr val="173A5E"/>
-                </a:solidFill>
-                <a:latin typeface="Calibri" pitchFamily="34" charset="0"/>
-                <a:ea typeface="Calibri" pitchFamily="34" charset="-122"/>
-                <a:cs typeface="Calibri" pitchFamily="34" charset="-120"/>
-              </a:rPr>
-              <a:t>⟩</a:t>
-            </a:r>
-            <a:endParaRPr lang="en-US" sz="1900" dirty="0"/>
+              <a:t>Costo in porte: 3 CNOT per passo (ricompilato, da 5)</a:t>
+            </a:r>
+            <a:endParaRPr lang="en-US" sz="1300" dirty="0"/>
           </a:p>
         </p:txBody>
       </p:sp>
       <p:pic>
         <p:nvPicPr>
-          <p:cNvPr id="7" name="Image 0" descr="/home/claude/deck/assets/thesis_figs/fig07_correlatore_validazione-1.png">    </p:cNvPr>
+          <p:cNvPr id="16" name="Image 0" descr="/home/claude/deck/assets/thesis_figs/fig06_trotter_errore-1.png">    </p:cNvPr>
           <p:cNvPicPr>
             <a:picLocks noChangeAspect="1"/>
           </p:cNvPicPr>
@@ -1251,257 +1428,14 @@
         </p:blipFill>
         <p:spPr>
           <a:xfrm>
-            <a:off x="3145454" y="2606040"/>
-            <a:ext cx="5900788" cy="3429000"/>
+            <a:off x="5831788" y="2148840"/>
+            <a:ext cx="5828896" cy="3657600"/>
           </a:xfrm>
           <a:prstGeom prst="rect">
             <a:avLst/>
           </a:prstGeom>
         </p:spPr>
       </p:pic>
-      <p:sp>
-        <p:nvSpPr>
-          <p:cNvPr id="8" name="Shape 5"/>
-          <p:cNvSpPr/>
-          <p:nvPr/>
-        </p:nvSpPr>
-        <p:spPr>
-          <a:xfrm>
-            <a:off x="640080" y="6172200"/>
-            <a:ext cx="3454298" cy="457200"/>
-          </a:xfrm>
-          <a:prstGeom prst="roundRect">
-            <a:avLst>
-              <a:gd name="adj" fmla="val 12000"/>
-            </a:avLst>
-          </a:prstGeom>
-          <a:solidFill>
-            <a:srgbClr val="F2F5F9"/>
-          </a:solidFill>
-          <a:ln/>
-        </p:spPr>
-      </p:sp>
-      <p:sp>
-        <p:nvSpPr>
-          <p:cNvPr id="9" name="Shape 6"/>
-          <p:cNvSpPr/>
-          <p:nvPr/>
-        </p:nvSpPr>
-        <p:spPr>
-          <a:xfrm>
-            <a:off x="786384" y="6345936"/>
-            <a:ext cx="109728" cy="109728"/>
-          </a:xfrm>
-          <a:prstGeom prst="ellipse">
-            <a:avLst/>
-          </a:prstGeom>
-          <a:solidFill>
-            <a:srgbClr val="2F7DB5"/>
-          </a:solidFill>
-          <a:ln/>
-        </p:spPr>
-      </p:sp>
-      <p:sp>
-        <p:nvSpPr>
-          <p:cNvPr id="10" name="Text 7"/>
-          <p:cNvSpPr txBox="1"/>
-          <p:nvPr/>
-        </p:nvSpPr>
-        <p:spPr>
-          <a:xfrm>
-            <a:off x="1005840" y="6172200"/>
-            <a:ext cx="2951378" cy="457200"/>
-          </a:xfrm>
-          <a:prstGeom prst="rect">
-            <a:avLst/>
-          </a:prstGeom>
-          <a:noFill/>
-          <a:ln/>
-        </p:spPr>
-        <p:txBody>
-          <a:bodyPr wrap="square" lIns="0" tIns="0" rIns="0" bIns="0" rtlCol="0" anchor="ctr"/>
-          <a:lstStyle/>
-          <a:p>
-            <a:pPr indent="0" marL="0">
-              <a:buNone/>
-            </a:pPr>
-            <a:r>
-              <a:rPr lang="en-US" sz="1250" dirty="0">
-                <a:solidFill>
-                  <a:srgbClr val="16233A"/>
-                </a:solidFill>
-                <a:latin typeface="Calibri" pitchFamily="34" charset="0"/>
-                <a:ea typeface="Calibri" pitchFamily="34" charset="-122"/>
-                <a:cs typeface="Calibri" pitchFamily="34" charset="-120"/>
-              </a:rPr>
-              <a:t>Evoluzione: decomposizione di Suzuki–Trotter</a:t>
-            </a:r>
-            <a:endParaRPr lang="en-US" sz="1250" dirty="0"/>
-          </a:p>
-        </p:txBody>
-      </p:sp>
-      <p:sp>
-        <p:nvSpPr>
-          <p:cNvPr id="11" name="Shape 8"/>
-          <p:cNvSpPr/>
-          <p:nvPr/>
-        </p:nvSpPr>
-        <p:spPr>
-          <a:xfrm>
-            <a:off x="4368698" y="6172200"/>
-            <a:ext cx="3454298" cy="457200"/>
-          </a:xfrm>
-          <a:prstGeom prst="roundRect">
-            <a:avLst>
-              <a:gd name="adj" fmla="val 12000"/>
-            </a:avLst>
-          </a:prstGeom>
-          <a:solidFill>
-            <a:srgbClr val="F2F5F9"/>
-          </a:solidFill>
-          <a:ln/>
-        </p:spPr>
-      </p:sp>
-      <p:sp>
-        <p:nvSpPr>
-          <p:cNvPr id="12" name="Shape 9"/>
-          <p:cNvSpPr/>
-          <p:nvPr/>
-        </p:nvSpPr>
-        <p:spPr>
-          <a:xfrm>
-            <a:off x="4515002" y="6345936"/>
-            <a:ext cx="109728" cy="109728"/>
-          </a:xfrm>
-          <a:prstGeom prst="ellipse">
-            <a:avLst/>
-          </a:prstGeom>
-          <a:solidFill>
-            <a:srgbClr val="D97B29"/>
-          </a:solidFill>
-          <a:ln/>
-        </p:spPr>
-      </p:sp>
-      <p:sp>
-        <p:nvSpPr>
-          <p:cNvPr id="13" name="Text 10"/>
-          <p:cNvSpPr txBox="1"/>
-          <p:nvPr/>
-        </p:nvSpPr>
-        <p:spPr>
-          <a:xfrm>
-            <a:off x="4734458" y="6172200"/>
-            <a:ext cx="2951378" cy="457200"/>
-          </a:xfrm>
-          <a:prstGeom prst="rect">
-            <a:avLst/>
-          </a:prstGeom>
-          <a:noFill/>
-          <a:ln/>
-        </p:spPr>
-        <p:txBody>
-          <a:bodyPr wrap="square" lIns="0" tIns="0" rIns="0" bIns="0" rtlCol="0" anchor="ctr"/>
-          <a:lstStyle/>
-          <a:p>
-            <a:pPr indent="0" marL="0">
-              <a:buNone/>
-            </a:pPr>
-            <a:r>
-              <a:rPr lang="en-US" sz="1250" dirty="0">
-                <a:solidFill>
-                  <a:srgbClr val="16233A"/>
-                </a:solidFill>
-                <a:latin typeface="Calibri" pitchFamily="34" charset="0"/>
-                <a:ea typeface="Calibri" pitchFamily="34" charset="-122"/>
-                <a:cs typeface="Calibri" pitchFamily="34" charset="-120"/>
-              </a:rPr>
-              <a:t>Correlatori: qubit ancilla (Hadamard test)</a:t>
-            </a:r>
-            <a:endParaRPr lang="en-US" sz="1250" dirty="0"/>
-          </a:p>
-        </p:txBody>
-      </p:sp>
-      <p:sp>
-        <p:nvSpPr>
-          <p:cNvPr id="14" name="Shape 11"/>
-          <p:cNvSpPr/>
-          <p:nvPr/>
-        </p:nvSpPr>
-        <p:spPr>
-          <a:xfrm>
-            <a:off x="8097317" y="6172200"/>
-            <a:ext cx="3454298" cy="457200"/>
-          </a:xfrm>
-          <a:prstGeom prst="roundRect">
-            <a:avLst>
-              <a:gd name="adj" fmla="val 12000"/>
-            </a:avLst>
-          </a:prstGeom>
-          <a:solidFill>
-            <a:srgbClr val="F2F5F9"/>
-          </a:solidFill>
-          <a:ln/>
-        </p:spPr>
-      </p:sp>
-      <p:sp>
-        <p:nvSpPr>
-          <p:cNvPr id="15" name="Shape 12"/>
-          <p:cNvSpPr/>
-          <p:nvPr/>
-        </p:nvSpPr>
-        <p:spPr>
-          <a:xfrm>
-            <a:off x="8243621" y="6345936"/>
-            <a:ext cx="109728" cy="109728"/>
-          </a:xfrm>
-          <a:prstGeom prst="ellipse">
-            <a:avLst/>
-          </a:prstGeom>
-          <a:solidFill>
-            <a:srgbClr val="1FA97C"/>
-          </a:solidFill>
-          <a:ln/>
-        </p:spPr>
-      </p:sp>
-      <p:sp>
-        <p:nvSpPr>
-          <p:cNvPr id="16" name="Text 13"/>
-          <p:cNvSpPr txBox="1"/>
-          <p:nvPr/>
-        </p:nvSpPr>
-        <p:spPr>
-          <a:xfrm>
-            <a:off x="8463077" y="6172200"/>
-            <a:ext cx="2951378" cy="457200"/>
-          </a:xfrm>
-          <a:prstGeom prst="rect">
-            <a:avLst/>
-          </a:prstGeom>
-          <a:noFill/>
-          <a:ln/>
-        </p:spPr>
-        <p:txBody>
-          <a:bodyPr wrap="square" lIns="0" tIns="0" rIns="0" bIns="0" rtlCol="0" anchor="ctr"/>
-          <a:lstStyle/>
-          <a:p>
-            <a:pPr indent="0" marL="0">
-              <a:buNone/>
-            </a:pPr>
-            <a:r>
-              <a:rPr lang="en-US" sz="1250" dirty="0">
-                <a:solidFill>
-                  <a:srgbClr val="16233A"/>
-                </a:solidFill>
-                <a:latin typeface="Calibri" pitchFamily="34" charset="0"/>
-                <a:ea typeface="Calibri" pitchFamily="34" charset="-122"/>
-                <a:cs typeface="Calibri" pitchFamily="34" charset="-120"/>
-              </a:rPr>
-              <a:t>Validato: circuito vs calcolo esatto</a:t>
-            </a:r>
-            <a:endParaRPr lang="en-US" sz="1250" dirty="0"/>
-          </a:p>
-        </p:txBody>
-      </p:sp>
     </p:spTree>
   </p:cSld>
   <p:clrMapOvr>
